--- a/output/04-professional-skills/04-04-time-management.pptx
+++ b/output/04-professional-skills/04-04-time-management.pptx
@@ -4699,7 +4699,7 @@
                 </a:solidFill>
                 <a:latin typeface="Segoe UI"/>
               </a:rPr>
-              <a:t>Each one costs two minutes plus fifteen to refocus.</a:t>
+              <a:t>Each one costs a couple of minutes to answer, plus real time afterwards to refocus.</a:t>
             </a:r>
           </a:p>
           <a:p>
@@ -4721,7 +4721,7 @@
                 </a:solidFill>
                 <a:latin typeface="Segoe UI"/>
               </a:rPr>
-              <a:t>That is more than three hours, and it does not feel like it.</a:t>
+              <a:t>It adds up to far more of the morning than it feels like at the time.</a:t>
             </a:r>
           </a:p>
         </p:txBody>
@@ -4963,7 +4963,7 @@
                 </a:solidFill>
                 <a:latin typeface="Segoe UI"/>
               </a:rPr>
-              <a:t>Those nine take forty minutes together, once.</a:t>
+              <a:t>Those nine become one short run of conversations, handled together, once.</a:t>
             </a:r>
           </a:p>
           <a:p>
@@ -12338,7 +12338,7 @@
                 </a:solidFill>
                 <a:latin typeface="Segoe UI"/>
               </a:rPr>
-              <a:t>One chat notification costs fifteen minutes of refocusing, whatever your calendar says.</a:t>
+              <a:t>One chat notification breaks the block just as effectively as an open door, whatever your calendar says.</a:t>
             </a:r>
           </a:p>
         </p:txBody>
@@ -12637,7 +12637,7 @@
                 </a:solidFill>
                 <a:latin typeface="Segoe UI"/>
               </a:rPr>
-              <a:t>Twenty minutes of the two hours gone before anything moves.</a:t>
+              <a:t>A meaningful part of the two hours gone before anything moves.</a:t>
             </a:r>
           </a:p>
         </p:txBody>
@@ -17878,7 +17878,7 @@
                 </a:solidFill>
                 <a:latin typeface="Segoe UI Semibold"/>
               </a:rPr>
-              <a:t>Two minutes, plus fifteen to get back</a:t>
+              <a:t>Two minutes, plus real time to get back</a:t>
             </a:r>
           </a:p>
         </p:txBody>
@@ -17923,7 +17923,7 @@
                 </a:solidFill>
                 <a:latin typeface="Segoe UI"/>
               </a:rPr>
-              <a:t>The question genuinely takes two minutes. Returning to where you were in the analysis takes another fifteen. Four more colleagues arrive before eleven, and the block produces nothing.</a:t>
+              <a:t>The question genuinely takes two minutes. Returning to where you were in the analysis takes real time on top of that. Four more colleagues arrive before eleven, and the block produces nothing.</a:t>
             </a:r>
           </a:p>
         </p:txBody>
@@ -24161,7 +24161,7 @@
                 </a:solidFill>
                 <a:latin typeface="Segoe UI"/>
               </a:rPr>
-              <a:t>The two minutes plus about fifteen to refocus</a:t>
+              <a:t>The time to answer, plus the time it takes to get back to where you were</a:t>
             </a:r>
           </a:p>
         </p:txBody>
@@ -25650,7 +25650,7 @@
                 </a:solidFill>
                 <a:latin typeface="Segoe UI Semibold"/>
               </a:rPr>
-              <a:t>YOU CHOSE  B.  The two minutes plus about fifteen to refocus</a:t>
+              <a:t>YOU CHOSE  B.  The time to answer, plus the time it takes to get back to where you we</a:t>
             </a:r>
           </a:p>
         </p:txBody>
@@ -25695,7 +25695,7 @@
                 </a:solidFill>
                 <a:latin typeface="Segoe UI"/>
               </a:rPr>
-              <a:t>This is why eleven small interruptions can consume a morning without anyone noticing where it went. The arithmetic is invisible until you do it.</a:t>
+              <a:t>Getting back to where you were is real work, even though it is hard to put an exact number on. That is why a handful of small interruptions can consume a morning without anyone noticing where it went.</a:t>
             </a:r>
           </a:p>
         </p:txBody>
@@ -29068,7 +29068,7 @@
                 </a:solidFill>
                 <a:latin typeface="Segoe UI"/>
               </a:rPr>
-              <a:t>Choosing at the start wastes twenty minutes of it</a:t>
+              <a:t>Choosing at the start spends your freshest protected time on the decision, not the work</a:t>
             </a:r>
           </a:p>
         </p:txBody>
@@ -32386,7 +32386,7 @@
                 </a:solidFill>
                 <a:latin typeface="Segoe UI Semibold"/>
               </a:rPr>
-              <a:t>YOU CHOSE  B.  Choosing at the start wastes twenty minutes of it</a:t>
+              <a:t>YOU CHOSE  B.  Choosing at the start spends your freshest protected time on the decis</a:t>
             </a:r>
           </a:p>
         </p:txBody>
@@ -32431,7 +32431,7 @@
                 </a:solidFill>
                 <a:latin typeface="Segoe UI"/>
               </a:rPr>
-              <a:t>Deciding is real work, and doing it inside your two protected hours spends the freshest part of them on something you could have settled in thirty seconds the evening before.</a:t>
+              <a:t>Deciding is real work, and doing it inside your two protected hours spends the freshest part of them on something you could have settled the evening before, in far less time.</a:t>
             </a:r>
           </a:p>
         </p:txBody>
@@ -53617,7 +53617,7 @@
                 </a:solidFill>
                 <a:latin typeface="Segoe UI"/>
               </a:rPr>
-              <a:t>Choosing inside the block spends its freshest twenty minutes.</a:t>
+              <a:t>Choosing inside the block spends its freshest, most protected time on the decision instead of the work.</a:t>
             </a:r>
           </a:p>
         </p:txBody>
@@ -59676,7 +59676,7 @@
                 </a:solidFill>
                 <a:latin typeface="Segoe UI"/>
               </a:rPr>
-              <a:t>Moving between tasks. Costs roughly fifteen minutes of refocusing each time.</a:t>
+              <a:t>Moving between tasks. Costs real, hard-to-measure time refocusing each time, even when the interruption itself was brief.</a:t>
             </a:r>
           </a:p>
         </p:txBody>
@@ -64605,7 +64605,7 @@
                 </a:solidFill>
                 <a:latin typeface="Segoe UI"/>
               </a:rPr>
-              <a:t>Choosing what to work on inside the block wastes twenty minutes of it.</a:t>
+              <a:t>Choosing what to work on inside the block eats into the freshest, most protected part of it.</a:t>
             </a:r>
           </a:p>
         </p:txBody>
@@ -65209,7 +65209,7 @@
                 </a:solidFill>
                 <a:latin typeface="Segoe UI"/>
               </a:rPr>
-              <a:t>The cost of an interruption is not the two minutes. It is the fifteen it takes to get back to where you were.</a:t>
+              <a:t>The cost of an interruption is not the couple of minutes it takes to answer. It is the time it takes afterwards to get back to where you were.</a:t>
             </a:r>
           </a:p>
         </p:txBody>
